--- a/assets/pptx/catalog-32.pptx
+++ b/assets/pptx/catalog-32.pptx
@@ -3321,7 +3321,7 @@
                 <a:ea typeface="Ebrima"/>
                 <a:cs typeface="Ebrima"/>
               </a:rPr>
-              <a:t>ፍቅር እንደ ኢየሱስ የለም (8X)</a:t>
+              <a:t>ፍቅር እንደ ኢየሱስ የለም 8X</a:t>
             </a:r>
           </a:p>
         </p:txBody>
@@ -3388,7 +3388,7 @@
                 <a:ea typeface="Ebrima"/>
                 <a:cs typeface="Ebrima"/>
               </a:rPr>
-              <a:t>አለሁ በምህረቱ አለሁ በይቅርታው (እየማረኝ) አለሁ</a:t>
+              <a:t>አለሁ በምህረቱ አለሁ በይቅርታው እየማረኝ አለሁ</a:t>
             </a:r>
           </a:p>
           <a:p>
@@ -3527,7 +3527,7 @@
                 <a:ea typeface="Ebrima"/>
                 <a:cs typeface="Ebrima"/>
               </a:rPr>
-              <a:t>አለሁ ህመሜን ወስዷል አለሁ እኔ ምን እሆናለሁ(2x)</a:t>
+              <a:t>አለሁ ህመሜን ወስዷል አለሁ እኔ ምን እሆናለሁ2x</a:t>
             </a:r>
           </a:p>
         </p:txBody>
@@ -3877,7 +3877,7 @@
                 <a:ea typeface="Ebrima"/>
                 <a:cs typeface="Ebrima"/>
               </a:rPr>
-              <a:t>አለሁ ህመሜን ወስዷል አለሁ እኔ ምን እሆናለሁ(2x)</a:t>
+              <a:t>አለሁ ህመሜን ወስዷል አለሁ እኔ ምን እሆናለሁ2x</a:t>
             </a:r>
           </a:p>
         </p:txBody>
@@ -4227,7 +4227,7 @@
                 <a:ea typeface="Ebrima"/>
                 <a:cs typeface="Ebrima"/>
               </a:rPr>
-              <a:t>አለሁ ህመሜን ወስዷል አለሁ እኔ ምን እሆናለሁ(2x)</a:t>
+              <a:t>አለሁ ህመሜን ወስዷል አለሁ እኔ ምን እሆናለሁ2x</a:t>
             </a:r>
           </a:p>
         </p:txBody>
@@ -4433,7 +4433,7 @@
                 <a:ea typeface="Ebrima"/>
                 <a:cs typeface="Ebrima"/>
               </a:rPr>
-              <a:t>አለሁ ህመሜን ወስዷል አለሁ እኔ ምን እሆናለሁ(2x)</a:t>
+              <a:t>አለሁ ህመሜን ወስዷል አለሁ እኔ ምን እሆናለሁ2x</a:t>
             </a:r>
           </a:p>
         </p:txBody>
